--- a/AI_for_Finance_Course/Slides/Class_04_Market_Risk_Portfolio.pptx
+++ b/AI_for_Finance_Course/Slides/Class_04_Market_Risk_Portfolio.pptx
@@ -498,6 +498,10 @@
           </p:nvPr>
         </p:nvSpPr>
         <p:spPr/>
+        <p:txBody>
+          <a:bodyPr/>
+          <a:p/>
+        </p:txBody>
       </p:sp>
       <p:sp>
         <p:nvSpPr>
@@ -586,6 +590,10 @@
           </p:nvPr>
         </p:nvSpPr>
         <p:spPr/>
+        <p:txBody>
+          <a:bodyPr/>
+          <a:p/>
+        </p:txBody>
       </p:sp>
       <p:sp>
         <p:nvSpPr>
@@ -674,6 +682,10 @@
           </p:nvPr>
         </p:nvSpPr>
         <p:spPr/>
+        <p:txBody>
+          <a:bodyPr/>
+          <a:p/>
+        </p:txBody>
       </p:sp>
       <p:sp>
         <p:nvSpPr>
@@ -762,6 +774,10 @@
           </p:nvPr>
         </p:nvSpPr>
         <p:spPr/>
+        <p:txBody>
+          <a:bodyPr/>
+          <a:p/>
+        </p:txBody>
       </p:sp>
       <p:sp>
         <p:nvSpPr>
@@ -850,6 +866,10 @@
           </p:nvPr>
         </p:nvSpPr>
         <p:spPr/>
+        <p:txBody>
+          <a:bodyPr/>
+          <a:p/>
+        </p:txBody>
       </p:sp>
       <p:sp>
         <p:nvSpPr>
@@ -938,6 +958,10 @@
           </p:nvPr>
         </p:nvSpPr>
         <p:spPr/>
+        <p:txBody>
+          <a:bodyPr/>
+          <a:p/>
+        </p:txBody>
       </p:sp>
       <p:sp>
         <p:nvSpPr>
@@ -1026,6 +1050,10 @@
           </p:nvPr>
         </p:nvSpPr>
         <p:spPr/>
+        <p:txBody>
+          <a:bodyPr/>
+          <a:p/>
+        </p:txBody>
       </p:sp>
       <p:sp>
         <p:nvSpPr>
@@ -1114,6 +1142,10 @@
           </p:nvPr>
         </p:nvSpPr>
         <p:spPr/>
+        <p:txBody>
+          <a:bodyPr/>
+          <a:p/>
+        </p:txBody>
       </p:sp>
       <p:sp>
         <p:nvSpPr>
@@ -1202,6 +1234,10 @@
           </p:nvPr>
         </p:nvSpPr>
         <p:spPr/>
+        <p:txBody>
+          <a:bodyPr/>
+          <a:p/>
+        </p:txBody>
       </p:sp>
       <p:sp>
         <p:nvSpPr>
@@ -1290,6 +1326,10 @@
           </p:nvPr>
         </p:nvSpPr>
         <p:spPr/>
+        <p:txBody>
+          <a:bodyPr/>
+          <a:p/>
+        </p:txBody>
       </p:sp>
       <p:sp>
         <p:nvSpPr>
@@ -1378,6 +1418,10 @@
           </p:nvPr>
         </p:nvSpPr>
         <p:spPr/>
+        <p:txBody>
+          <a:bodyPr/>
+          <a:p/>
+        </p:txBody>
       </p:sp>
       <p:sp>
         <p:nvSpPr>
@@ -1466,6 +1510,10 @@
           </p:nvPr>
         </p:nvSpPr>
         <p:spPr/>
+        <p:txBody>
+          <a:bodyPr/>
+          <a:p/>
+        </p:txBody>
       </p:sp>
       <p:sp>
         <p:nvSpPr>
@@ -1554,6 +1602,10 @@
           </p:nvPr>
         </p:nvSpPr>
         <p:spPr/>
+        <p:txBody>
+          <a:bodyPr/>
+          <a:p/>
+        </p:txBody>
       </p:sp>
       <p:sp>
         <p:nvSpPr>
@@ -1642,6 +1694,10 @@
           </p:nvPr>
         </p:nvSpPr>
         <p:spPr/>
+        <p:txBody>
+          <a:bodyPr/>
+          <a:p/>
+        </p:txBody>
       </p:sp>
       <p:sp>
         <p:nvSpPr>
@@ -1730,6 +1786,10 @@
           </p:nvPr>
         </p:nvSpPr>
         <p:spPr/>
+        <p:txBody>
+          <a:bodyPr/>
+          <a:p/>
+        </p:txBody>
       </p:sp>
       <p:sp>
         <p:nvSpPr>
@@ -2367,6 +2427,10 @@
           </a:solidFill>
           <a:ln/>
         </p:spPr>
+        <p:txBody>
+          <a:bodyPr/>
+          <a:p/>
+        </p:txBody>
       </p:sp>
       <p:sp>
         <p:nvSpPr>
@@ -2465,6 +2529,10 @@
           </a:solidFill>
           <a:ln/>
         </p:spPr>
+        <p:txBody>
+          <a:bodyPr/>
+          <a:p/>
+        </p:txBody>
       </p:sp>
       <p:sp>
         <p:nvSpPr>
@@ -2563,6 +2631,10 @@
           </a:solidFill>
           <a:ln/>
         </p:spPr>
+        <p:txBody>
+          <a:bodyPr/>
+          <a:p/>
+        </p:txBody>
       </p:sp>
       <p:sp>
         <p:nvSpPr>
@@ -2661,6 +2733,10 @@
           </a:solidFill>
           <a:ln/>
         </p:spPr>
+        <p:txBody>
+          <a:bodyPr/>
+          <a:p/>
+        </p:txBody>
       </p:sp>
       <p:sp>
         <p:nvSpPr>
@@ -2759,6 +2835,10 @@
           </a:solidFill>
           <a:ln/>
         </p:spPr>
+        <p:txBody>
+          <a:bodyPr/>
+          <a:p/>
+        </p:txBody>
       </p:sp>
       <p:sp>
         <p:nvSpPr>
@@ -2857,6 +2937,10 @@
           </a:solidFill>
           <a:ln/>
         </p:spPr>
+        <p:txBody>
+          <a:bodyPr/>
+          <a:p/>
+        </p:txBody>
       </p:sp>
       <p:sp>
         <p:nvSpPr>
@@ -2987,6 +3071,10 @@
           </a:solidFill>
           <a:ln/>
         </p:spPr>
+        <p:txBody>
+          <a:bodyPr/>
+          <a:p/>
+        </p:txBody>
       </p:sp>
       <p:sp>
         <p:nvSpPr>
@@ -3085,6 +3173,10 @@
           </a:solidFill>
           <a:ln/>
         </p:spPr>
+        <p:txBody>
+          <a:bodyPr/>
+          <a:p/>
+        </p:txBody>
       </p:sp>
       <p:sp>
         <p:nvSpPr>
@@ -3183,6 +3275,10 @@
           </a:solidFill>
           <a:ln/>
         </p:spPr>
+        <p:txBody>
+          <a:bodyPr/>
+          <a:p/>
+        </p:txBody>
       </p:sp>
       <p:sp>
         <p:nvSpPr>
@@ -3281,6 +3377,10 @@
           </a:solidFill>
           <a:ln/>
         </p:spPr>
+        <p:txBody>
+          <a:bodyPr/>
+          <a:p/>
+        </p:txBody>
       </p:sp>
       <p:sp>
         <p:nvSpPr>
@@ -3379,6 +3479,10 @@
           </a:solidFill>
           <a:ln/>
         </p:spPr>
+        <p:txBody>
+          <a:bodyPr/>
+          <a:p/>
+        </p:txBody>
       </p:sp>
       <p:sp>
         <p:nvSpPr>
@@ -3509,6 +3613,10 @@
           </a:solidFill>
           <a:ln/>
         </p:spPr>
+        <p:txBody>
+          <a:bodyPr/>
+          <a:p/>
+        </p:txBody>
       </p:sp>
       <p:sp>
         <p:nvSpPr>
@@ -3607,6 +3715,10 @@
           </a:solidFill>
           <a:ln/>
         </p:spPr>
+        <p:txBody>
+          <a:bodyPr/>
+          <a:p/>
+        </p:txBody>
       </p:sp>
       <p:sp>
         <p:nvSpPr>
@@ -3705,6 +3817,10 @@
           </a:solidFill>
           <a:ln/>
         </p:spPr>
+        <p:txBody>
+          <a:bodyPr/>
+          <a:p/>
+        </p:txBody>
       </p:sp>
       <p:sp>
         <p:nvSpPr>
@@ -3803,6 +3919,10 @@
           </a:solidFill>
           <a:ln/>
         </p:spPr>
+        <p:txBody>
+          <a:bodyPr/>
+          <a:p/>
+        </p:txBody>
       </p:sp>
       <p:sp>
         <p:nvSpPr>
@@ -3901,6 +4021,10 @@
           </a:solidFill>
           <a:ln/>
         </p:spPr>
+        <p:txBody>
+          <a:bodyPr/>
+          <a:p/>
+        </p:txBody>
       </p:sp>
       <p:sp>
         <p:nvSpPr>
@@ -4031,6 +4155,10 @@
           </a:solidFill>
           <a:ln/>
         </p:spPr>
+        <p:txBody>
+          <a:bodyPr/>
+          <a:p/>
+        </p:txBody>
       </p:sp>
       <p:sp>
         <p:nvSpPr>
@@ -4134,6 +4262,10 @@
             <a:prstDash val="solid"/>
           </a:ln>
         </p:spPr>
+        <p:txBody>
+          <a:bodyPr/>
+          <a:p/>
+        </p:txBody>
       </p:sp>
       <p:sp>
         <p:nvSpPr>
@@ -4198,6 +4330,10 @@
             <a:prstDash val="solid"/>
           </a:ln>
         </p:spPr>
+        <p:txBody>
+          <a:bodyPr/>
+          <a:p/>
+        </p:txBody>
       </p:sp>
       <p:sp>
         <p:nvSpPr>
@@ -4262,6 +4398,10 @@
             <a:prstDash val="solid"/>
           </a:ln>
         </p:spPr>
+        <p:txBody>
+          <a:bodyPr/>
+          <a:p/>
+        </p:txBody>
       </p:sp>
       <p:sp>
         <p:nvSpPr>
@@ -4326,6 +4466,10 @@
             <a:prstDash val="solid"/>
           </a:ln>
         </p:spPr>
+        <p:txBody>
+          <a:bodyPr/>
+          <a:p/>
+        </p:txBody>
       </p:sp>
       <p:sp>
         <p:nvSpPr>
@@ -4390,6 +4534,10 @@
             <a:prstDash val="solid"/>
           </a:ln>
         </p:spPr>
+        <p:txBody>
+          <a:bodyPr/>
+          <a:p/>
+        </p:txBody>
       </p:sp>
       <p:sp>
         <p:nvSpPr>
@@ -4454,6 +4602,10 @@
             <a:prstDash val="solid"/>
           </a:ln>
         </p:spPr>
+        <p:txBody>
+          <a:bodyPr/>
+          <a:p/>
+        </p:txBody>
       </p:sp>
       <p:sp>
         <p:nvSpPr>
@@ -4545,6 +4697,10 @@
           </a:solidFill>
           <a:ln/>
         </p:spPr>
+        <p:txBody>
+          <a:bodyPr/>
+          <a:p/>
+        </p:txBody>
       </p:sp>
       <p:sp>
         <p:nvSpPr>
@@ -4648,6 +4804,10 @@
             <a:prstDash val="solid"/>
           </a:ln>
         </p:spPr>
+        <p:txBody>
+          <a:bodyPr/>
+          <a:p/>
+        </p:txBody>
       </p:sp>
       <p:sp>
         <p:nvSpPr>
@@ -4712,6 +4872,10 @@
             <a:prstDash val="solid"/>
           </a:ln>
         </p:spPr>
+        <p:txBody>
+          <a:bodyPr/>
+          <a:p/>
+        </p:txBody>
       </p:sp>
       <p:sp>
         <p:nvSpPr>
@@ -4776,6 +4940,10 @@
             <a:prstDash val="solid"/>
           </a:ln>
         </p:spPr>
+        <p:txBody>
+          <a:bodyPr/>
+          <a:p/>
+        </p:txBody>
       </p:sp>
       <p:sp>
         <p:nvSpPr>
@@ -4840,6 +5008,10 @@
             <a:prstDash val="solid"/>
           </a:ln>
         </p:spPr>
+        <p:txBody>
+          <a:bodyPr/>
+          <a:p/>
+        </p:txBody>
       </p:sp>
       <p:sp>
         <p:nvSpPr>
@@ -4904,6 +5076,10 @@
             <a:prstDash val="solid"/>
           </a:ln>
         </p:spPr>
+        <p:txBody>
+          <a:bodyPr/>
+          <a:p/>
+        </p:txBody>
       </p:sp>
       <p:sp>
         <p:nvSpPr>
@@ -5048,7 +5224,7 @@
                 <a:ea typeface="Calibri" pitchFamily="34" charset="-122"/>
                 <a:cs typeface="Calibri" pitchFamily="34" charset="-120"/>
               </a:rPr>
-              <a:t>www.proxiant.com</a:t>
+              <a:t>proxiant.ai</a:t>
             </a:r>
             <a:endParaRPr lang="en-US" sz="2800" dirty="0"/>
           </a:p>
@@ -5144,6 +5320,10 @@
           </a:solidFill>
           <a:ln/>
         </p:spPr>
+        <p:txBody>
+          <a:bodyPr/>
+          <a:p/>
+        </p:txBody>
       </p:sp>
       <p:sp>
         <p:nvSpPr>
@@ -5513,6 +5693,10 @@
           </a:solidFill>
           <a:ln/>
         </p:spPr>
+        <p:txBody>
+          <a:bodyPr/>
+          <a:p/>
+        </p:txBody>
       </p:sp>
       <p:sp>
         <p:nvSpPr>
@@ -5611,6 +5795,10 @@
           </a:solidFill>
           <a:ln/>
         </p:spPr>
+        <p:txBody>
+          <a:bodyPr/>
+          <a:p/>
+        </p:txBody>
       </p:sp>
       <p:sp>
         <p:nvSpPr>
@@ -5709,6 +5897,10 @@
           </a:solidFill>
           <a:ln/>
         </p:spPr>
+        <p:txBody>
+          <a:bodyPr/>
+          <a:p/>
+        </p:txBody>
       </p:sp>
       <p:sp>
         <p:nvSpPr>
@@ -5807,6 +5999,10 @@
           </a:solidFill>
           <a:ln/>
         </p:spPr>
+        <p:txBody>
+          <a:bodyPr/>
+          <a:p/>
+        </p:txBody>
       </p:sp>
       <p:sp>
         <p:nvSpPr>
@@ -5905,6 +6101,10 @@
           </a:solidFill>
           <a:ln/>
         </p:spPr>
+        <p:txBody>
+          <a:bodyPr/>
+          <a:p/>
+        </p:txBody>
       </p:sp>
       <p:sp>
         <p:nvSpPr>
@@ -6035,6 +6235,10 @@
           </a:solidFill>
           <a:ln/>
         </p:spPr>
+        <p:txBody>
+          <a:bodyPr/>
+          <a:p/>
+        </p:txBody>
       </p:sp>
       <p:sp>
         <p:nvSpPr>
@@ -6483,6 +6687,10 @@
           </a:solidFill>
           <a:ln/>
         </p:spPr>
+        <p:txBody>
+          <a:bodyPr/>
+          <a:p/>
+        </p:txBody>
       </p:sp>
       <p:sp>
         <p:nvSpPr>
@@ -6620,6 +6828,10 @@
           </a:solidFill>
           <a:ln/>
         </p:spPr>
+        <p:txBody>
+          <a:bodyPr/>
+          <a:p/>
+        </p:txBody>
       </p:sp>
       <p:sp>
         <p:nvSpPr>
@@ -6718,6 +6930,10 @@
           </a:solidFill>
           <a:ln/>
         </p:spPr>
+        <p:txBody>
+          <a:bodyPr/>
+          <a:p/>
+        </p:txBody>
       </p:sp>
       <p:sp>
         <p:nvSpPr>
@@ -6816,6 +7032,10 @@
           </a:solidFill>
           <a:ln/>
         </p:spPr>
+        <p:txBody>
+          <a:bodyPr/>
+          <a:p/>
+        </p:txBody>
       </p:sp>
       <p:sp>
         <p:nvSpPr>
@@ -6914,6 +7134,10 @@
           </a:solidFill>
           <a:ln/>
         </p:spPr>
+        <p:txBody>
+          <a:bodyPr/>
+          <a:p/>
+        </p:txBody>
       </p:sp>
       <p:sp>
         <p:nvSpPr>
@@ -7044,6 +7268,10 @@
           </a:solidFill>
           <a:ln/>
         </p:spPr>
+        <p:txBody>
+          <a:bodyPr/>
+          <a:p/>
+        </p:txBody>
       </p:sp>
       <p:sp>
         <p:nvSpPr>
@@ -7142,6 +7370,10 @@
           </a:solidFill>
           <a:ln/>
         </p:spPr>
+        <p:txBody>
+          <a:bodyPr/>
+          <a:p/>
+        </p:txBody>
       </p:sp>
       <p:sp>
         <p:nvSpPr>
@@ -7240,6 +7472,10 @@
           </a:solidFill>
           <a:ln/>
         </p:spPr>
+        <p:txBody>
+          <a:bodyPr/>
+          <a:p/>
+        </p:txBody>
       </p:sp>
       <p:sp>
         <p:nvSpPr>
@@ -7338,6 +7574,10 @@
           </a:solidFill>
           <a:ln/>
         </p:spPr>
+        <p:txBody>
+          <a:bodyPr/>
+          <a:p/>
+        </p:txBody>
       </p:sp>
       <p:sp>
         <p:nvSpPr>
@@ -7436,6 +7676,10 @@
           </a:solidFill>
           <a:ln/>
         </p:spPr>
+        <p:txBody>
+          <a:bodyPr/>
+          <a:p/>
+        </p:txBody>
       </p:sp>
       <p:sp>
         <p:nvSpPr>
@@ -7566,6 +7810,10 @@
           </a:solidFill>
           <a:ln/>
         </p:spPr>
+        <p:txBody>
+          <a:bodyPr/>
+          <a:p/>
+        </p:txBody>
       </p:sp>
       <p:sp>
         <p:nvSpPr>
@@ -7664,6 +7912,10 @@
           </a:solidFill>
           <a:ln/>
         </p:spPr>
+        <p:txBody>
+          <a:bodyPr/>
+          <a:p/>
+        </p:txBody>
       </p:sp>
       <p:sp>
         <p:nvSpPr>
@@ -7801,6 +8053,10 @@
           </a:solidFill>
           <a:ln/>
         </p:spPr>
+        <p:txBody>
+          <a:bodyPr/>
+          <a:p/>
+        </p:txBody>
       </p:sp>
       <p:sp>
         <p:nvSpPr>
@@ -7938,6 +8194,10 @@
           </a:solidFill>
           <a:ln/>
         </p:spPr>
+        <p:txBody>
+          <a:bodyPr/>
+          <a:p/>
+        </p:txBody>
       </p:sp>
       <p:sp>
         <p:nvSpPr>
@@ -8075,6 +8335,10 @@
           </a:solidFill>
           <a:ln/>
         </p:spPr>
+        <p:txBody>
+          <a:bodyPr/>
+          <a:p/>
+        </p:txBody>
       </p:sp>
       <p:sp>
         <p:nvSpPr>
@@ -8212,6 +8476,10 @@
           </a:solidFill>
           <a:ln/>
         </p:spPr>
+        <p:txBody>
+          <a:bodyPr/>
+          <a:p/>
+        </p:txBody>
       </p:sp>
       <p:sp>
         <p:nvSpPr>
@@ -8381,6 +8649,10 @@
           </a:solidFill>
           <a:ln/>
         </p:spPr>
+        <p:txBody>
+          <a:bodyPr/>
+          <a:p/>
+        </p:txBody>
       </p:sp>
       <p:sp>
         <p:nvSpPr>
@@ -8479,6 +8751,10 @@
           </a:solidFill>
           <a:ln/>
         </p:spPr>
+        <p:txBody>
+          <a:bodyPr/>
+          <a:p/>
+        </p:txBody>
       </p:sp>
       <p:sp>
         <p:nvSpPr>
@@ -8541,6 +8817,10 @@
             <a:prstDash val="solid"/>
           </a:ln>
         </p:spPr>
+        <p:txBody>
+          <a:bodyPr/>
+          <a:p/>
+        </p:txBody>
       </p:sp>
       <p:sp>
         <p:nvSpPr>
@@ -8639,6 +8919,10 @@
           </a:solidFill>
           <a:ln/>
         </p:spPr>
+        <p:txBody>
+          <a:bodyPr/>
+          <a:p/>
+        </p:txBody>
       </p:sp>
       <p:sp>
         <p:nvSpPr>
@@ -8701,6 +8985,10 @@
             <a:prstDash val="solid"/>
           </a:ln>
         </p:spPr>
+        <p:txBody>
+          <a:bodyPr/>
+          <a:p/>
+        </p:txBody>
       </p:sp>
       <p:sp>
         <p:nvSpPr>
@@ -8799,6 +9087,10 @@
           </a:solidFill>
           <a:ln/>
         </p:spPr>
+        <p:txBody>
+          <a:bodyPr/>
+          <a:p/>
+        </p:txBody>
       </p:sp>
       <p:sp>
         <p:nvSpPr>
@@ -8861,6 +9153,10 @@
             <a:prstDash val="solid"/>
           </a:ln>
         </p:spPr>
+        <p:txBody>
+          <a:bodyPr/>
+          <a:p/>
+        </p:txBody>
       </p:sp>
       <p:sp>
         <p:nvSpPr>
@@ -8959,6 +9255,10 @@
           </a:solidFill>
           <a:ln/>
         </p:spPr>
+        <p:txBody>
+          <a:bodyPr/>
+          <a:p/>
+        </p:txBody>
       </p:sp>
       <p:sp>
         <p:nvSpPr>
@@ -9021,6 +9321,10 @@
             <a:prstDash val="solid"/>
           </a:ln>
         </p:spPr>
+        <p:txBody>
+          <a:bodyPr/>
+          <a:p/>
+        </p:txBody>
       </p:sp>
       <p:sp>
         <p:nvSpPr>
@@ -9119,6 +9423,10 @@
           </a:solidFill>
           <a:ln/>
         </p:spPr>
+        <p:txBody>
+          <a:bodyPr/>
+          <a:p/>
+        </p:txBody>
       </p:sp>
       <p:sp>
         <p:nvSpPr>
@@ -9288,6 +9596,10 @@
           </a:solidFill>
           <a:ln/>
         </p:spPr>
+        <p:txBody>
+          <a:bodyPr/>
+          <a:p/>
+        </p:txBody>
       </p:sp>
       <p:sp>
         <p:nvSpPr>
